--- a/site/clases/parte-3-estadistica-inferencial/178-test-chi-cuadrado-de-independencia-y-bondad-de-ajuste/clase-178-test-chi-cuadrado-de-independencia-y-bondad-de-ajuste-presentacion.pptx
+++ b/site/clases/parte-3-estadistica-inferencial/178-test-chi-cuadrado-de-independencia-y-bondad-de-ajuste/clase-178-test-chi-cuadrado-de-independencia-y-bondad-de-ajuste-presentacion.pptx
@@ -3272,7 +3272,7 @@
                 </a:solidFill>
                 <a:latin typeface="Segoe UI"/>
               </a:rPr>
-              <a:t>Parte: 3 — Estadística Inferencial y Causal · Fuente: ISLP, cap. 4 + Bruce &amp; Bruce, cap. 3 Chi-Square Test.  Duración estimada: 70 min.</a:t>
+              <a:t>Parte: 3 — Estadística Inferencial y Causal · Fuente: ISLP, cap. 4 + Bruce &amp; Bruce, cap. 3 Chi-Square Test.  Duración estimada: 70 min. · Nivel: Intermedio-Avanzado</a:t>
             </a:r>
           </a:p>
         </p:txBody>
@@ -3581,7 +3581,7 @@
                 </a:solidFill>
                 <a:latin typeface="Segoe UI"/>
               </a:rPr>
-              <a:t>Parte: 3 — Estadística Inferencial y Causal · Fuente: ISLP, cap. 4 + Bruce &amp; Bruce, cap. 3 Chi-Square Test.  Duración estimada: 70 min.</a:t>
+              <a:t>Parte: 3 — Estadística Inferencial y Causal · Fuente: ISLP, cap. 4 + Bruce &amp; Bruce, cap. 3 Chi-Square Test.  Duración estimada: 70 min. · Nivel: Intermedio-Avanzado</a:t>
             </a:r>
           </a:p>
         </p:txBody>
@@ -4845,7 +4845,7 @@
                 </a:solidFill>
                 <a:latin typeface="Segoe UI"/>
               </a:rPr>
-              <a:t>Primer bloque ejecutable del notebook.</a:t>
+              <a:t>H₀: las variables son independientes. Simulamos supervivencia dependiente de la clase (estilo Titanic).</a:t>
             </a:r>
           </a:p>
         </p:txBody>
@@ -4932,7 +4932,311 @@
                 </a:solidFill>
                 <a:latin typeface="Courier New"/>
               </a:rPr>
-              <a:t># Imports y configuración inicial</a:t>
+              <a:t>import numpy as np</a:t>
+            </a:r>
+          </a:p>
+          <a:p>
+            <a:pPr>
+              <a:defRPr sz="1200" b="0">
+                <a:solidFill>
+                  <a:srgbClr val="F8FAFC"/>
+                </a:solidFill>
+                <a:latin typeface="Courier New"/>
+              </a:defRPr>
+            </a:pPr>
+            <a:r>
+              <a:rPr sz="1200" b="0">
+                <a:solidFill>
+                  <a:srgbClr val="F8FAFC"/>
+                </a:solidFill>
+                <a:latin typeface="Courier New"/>
+              </a:rPr>
+              <a:t>import pandas as pd</a:t>
+            </a:r>
+          </a:p>
+          <a:p>
+            <a:pPr>
+              <a:defRPr sz="1200" b="0">
+                <a:solidFill>
+                  <a:srgbClr val="F8FAFC"/>
+                </a:solidFill>
+                <a:latin typeface="Courier New"/>
+              </a:defRPr>
+            </a:pPr>
+            <a:r>
+              <a:rPr sz="1200" b="0">
+                <a:solidFill>
+                  <a:srgbClr val="F8FAFC"/>
+                </a:solidFill>
+                <a:latin typeface="Courier New"/>
+              </a:rPr>
+              <a:t>from scipy import stats</a:t>
+            </a:r>
+          </a:p>
+          <a:p>
+            <a:pPr>
+              <a:defRPr sz="1200" b="0">
+                <a:solidFill>
+                  <a:srgbClr val="F8FAFC"/>
+                </a:solidFill>
+                <a:latin typeface="Courier New"/>
+              </a:defRPr>
+            </a:pPr>
+            <a:r>
+              <a:rPr sz="1200" b="0">
+                <a:solidFill>
+                  <a:srgbClr val="F8FAFC"/>
+                </a:solidFill>
+                <a:latin typeface="Courier New"/>
+              </a:rPr>
+              <a:t>import matplotlib.pyplot as plt</a:t>
+            </a:r>
+          </a:p>
+          <a:p>
+            <a:pPr>
+              <a:defRPr sz="1200" b="0">
+                <a:solidFill>
+                  <a:srgbClr val="F8FAFC"/>
+                </a:solidFill>
+                <a:latin typeface="Courier New"/>
+              </a:defRPr>
+            </a:pPr>
+            <a:r>
+              <a:rPr sz="1200" b="0">
+                <a:solidFill>
+                  <a:srgbClr val="F8FAFC"/>
+                </a:solidFill>
+                <a:latin typeface="Courier New"/>
+              </a:rPr>
+              <a:t> </a:t>
+            </a:r>
+          </a:p>
+          <a:p>
+            <a:pPr>
+              <a:defRPr sz="1200" b="0">
+                <a:solidFill>
+                  <a:srgbClr val="F8FAFC"/>
+                </a:solidFill>
+                <a:latin typeface="Courier New"/>
+              </a:defRPr>
+            </a:pPr>
+            <a:r>
+              <a:rPr sz="1200" b="0">
+                <a:solidFill>
+                  <a:srgbClr val="F8FAFC"/>
+                </a:solidFill>
+                <a:latin typeface="Courier New"/>
+              </a:rPr>
+              <a:t>rng = np.random.default_rng(42)</a:t>
+            </a:r>
+          </a:p>
+          <a:p>
+            <a:pPr>
+              <a:defRPr sz="1200" b="0">
+                <a:solidFill>
+                  <a:srgbClr val="F8FAFC"/>
+                </a:solidFill>
+                <a:latin typeface="Courier New"/>
+              </a:defRPr>
+            </a:pPr>
+            <a:r>
+              <a:rPr sz="1200" b="0">
+                <a:solidFill>
+                  <a:srgbClr val="F8FAFC"/>
+                </a:solidFill>
+                <a:latin typeface="Courier New"/>
+              </a:rPr>
+              <a:t> </a:t>
+            </a:r>
+          </a:p>
+          <a:p>
+            <a:pPr>
+              <a:defRPr sz="1200" b="0">
+                <a:solidFill>
+                  <a:srgbClr val="F8FAFC"/>
+                </a:solidFill>
+                <a:latin typeface="Courier New"/>
+              </a:defRPr>
+            </a:pPr>
+            <a:r>
+              <a:rPr sz="1200" b="0">
+                <a:solidFill>
+                  <a:srgbClr val="F8FAFC"/>
+                </a:solidFill>
+                <a:latin typeface="Courier New"/>
+              </a:rPr>
+              <a:t>n = 1200</a:t>
+            </a:r>
+          </a:p>
+          <a:p>
+            <a:pPr>
+              <a:defRPr sz="1200" b="0">
+                <a:solidFill>
+                  <a:srgbClr val="F8FAFC"/>
+                </a:solidFill>
+                <a:latin typeface="Courier New"/>
+              </a:defRPr>
+            </a:pPr>
+            <a:r>
+              <a:rPr sz="1200" b="0">
+                <a:solidFill>
+                  <a:srgbClr val="F8FAFC"/>
+                </a:solidFill>
+                <a:latin typeface="Courier New"/>
+              </a:rPr>
+              <a:t>clase = rng.choice(["1a", "2a", "3a"], size=n, p=[0.25, 0.20, 0.55])</a:t>
+            </a:r>
+          </a:p>
+          <a:p>
+            <a:pPr>
+              <a:defRPr sz="1200" b="0">
+                <a:solidFill>
+                  <a:srgbClr val="F8FAFC"/>
+                </a:solidFill>
+                <a:latin typeface="Courier New"/>
+              </a:defRPr>
+            </a:pPr>
+            <a:r>
+              <a:rPr sz="1200" b="0">
+                <a:solidFill>
+                  <a:srgbClr val="F8FAFC"/>
+                </a:solidFill>
+                <a:latin typeface="Courier New"/>
+              </a:rPr>
+              <a:t>p_surv = {"1a": 0.62, "2a": 0.43, "3a": 0.24}</a:t>
+            </a:r>
+          </a:p>
+          <a:p>
+            <a:pPr>
+              <a:defRPr sz="1200" b="0">
+                <a:solidFill>
+                  <a:srgbClr val="F8FAFC"/>
+                </a:solidFill>
+                <a:latin typeface="Courier New"/>
+              </a:defRPr>
+            </a:pPr>
+            <a:r>
+              <a:rPr sz="1200" b="0">
+                <a:solidFill>
+                  <a:srgbClr val="F8FAFC"/>
+                </a:solidFill>
+                <a:latin typeface="Courier New"/>
+              </a:rPr>
+              <a:t>survived = np.array([rng.random() &lt; p_surv[c] for c in clase]).astype(int)</a:t>
+            </a:r>
+          </a:p>
+          <a:p>
+            <a:pPr>
+              <a:defRPr sz="1200" b="0">
+                <a:solidFill>
+                  <a:srgbClr val="F8FAFC"/>
+                </a:solidFill>
+                <a:latin typeface="Courier New"/>
+              </a:defRPr>
+            </a:pPr>
+            <a:r>
+              <a:rPr sz="1200" b="0">
+                <a:solidFill>
+                  <a:srgbClr val="F8FAFC"/>
+                </a:solidFill>
+                <a:latin typeface="Courier New"/>
+              </a:rPr>
+              <a:t> </a:t>
+            </a:r>
+          </a:p>
+          <a:p>
+            <a:pPr>
+              <a:defRPr sz="1200" b="0">
+                <a:solidFill>
+                  <a:srgbClr val="F8FAFC"/>
+                </a:solidFill>
+                <a:latin typeface="Courier New"/>
+              </a:defRPr>
+            </a:pPr>
+            <a:r>
+              <a:rPr sz="1200" b="0">
+                <a:solidFill>
+                  <a:srgbClr val="F8FAFC"/>
+                </a:solidFill>
+                <a:latin typeface="Courier New"/>
+              </a:rPr>
+              <a:t>tabla = pd.crosstab(pd.Series(survived, name="survived"), pd.Series(clase, name="clase"))</a:t>
+            </a:r>
+          </a:p>
+          <a:p>
+            <a:pPr>
+              <a:defRPr sz="1200" b="0">
+                <a:solidFill>
+                  <a:srgbClr val="F8FAFC"/>
+                </a:solidFill>
+                <a:latin typeface="Courier New"/>
+              </a:defRPr>
+            </a:pPr>
+            <a:r>
+              <a:rPr sz="1200" b="0">
+                <a:solidFill>
+                  <a:srgbClr val="F8FAFC"/>
+                </a:solidFill>
+                <a:latin typeface="Courier New"/>
+              </a:rPr>
+              <a:t>print(tabla)</a:t>
+            </a:r>
+          </a:p>
+          <a:p>
+            <a:pPr>
+              <a:defRPr sz="1200" b="0">
+                <a:solidFill>
+                  <a:srgbClr val="F8FAFC"/>
+                </a:solidFill>
+                <a:latin typeface="Courier New"/>
+              </a:defRPr>
+            </a:pPr>
+            <a:r>
+              <a:rPr sz="1200" b="0">
+                <a:solidFill>
+                  <a:srgbClr val="F8FAFC"/>
+                </a:solidFill>
+                <a:latin typeface="Courier New"/>
+              </a:rPr>
+              <a:t>chi2, p, dof, expected = stats.chi2_contingency(tabla)</a:t>
+            </a:r>
+          </a:p>
+          <a:p>
+            <a:pPr>
+              <a:defRPr sz="1200" b="0">
+                <a:solidFill>
+                  <a:srgbClr val="F8FAFC"/>
+                </a:solidFill>
+                <a:latin typeface="Courier New"/>
+              </a:defRPr>
+            </a:pPr>
+            <a:r>
+              <a:rPr sz="1200" b="0">
+                <a:solidFill>
+                  <a:srgbClr val="F8FAFC"/>
+                </a:solidFill>
+                <a:latin typeface="Courier New"/>
+              </a:rPr>
+              <a:t>print(f"\nχ²={chi2:.2f}  dof={dof}  p={p:.2e}")</a:t>
+            </a:r>
+          </a:p>
+          <a:p>
+            <a:pPr>
+              <a:defRPr sz="1200" b="0">
+                <a:solidFill>
+                  <a:srgbClr val="F8FAFC"/>
+                </a:solidFill>
+                <a:latin typeface="Courier New"/>
+              </a:defRPr>
+            </a:pPr>
+            <a:r>
+              <a:rPr sz="1200" b="0">
+                <a:solidFill>
+                  <a:srgbClr val="F8FAFC"/>
+                </a:solidFill>
+                <a:latin typeface="Courier New"/>
+              </a:rPr>
+              <a:t>assert p &lt; 0.001</a:t>
             </a:r>
           </a:p>
         </p:txBody>
